--- a/跨代傳承.pptx
+++ b/跨代傳承.pptx
@@ -112,6 +112,22 @@
       </a:defRPr>
     </a:lvl9pPr>
   </p:defaultTextStyle>
+  <p:extLst>
+    <p:ext uri="{EFAFB233-063F-42B5-8137-9DF3F51BA10A}">
+      <p15:sldGuideLst xmlns:p15="http://schemas.microsoft.com/office/powerpoint/2012/main">
+        <p15:guide id="1" orient="horz" pos="1620">
+          <p15:clr>
+            <a:srgbClr val="A4A3A4"/>
+          </p15:clr>
+        </p15:guide>
+        <p15:guide id="2" pos="2880">
+          <p15:clr>
+            <a:srgbClr val="A4A3A4"/>
+          </p15:clr>
+        </p15:guide>
+      </p15:sldGuideLst>
+    </p:ext>
+  </p:extLst>
 </p:presentation>
 </file>
 
@@ -153,10 +169,9 @@
           <a:lstStyle/>
           <a:p>
             <a:r>
-              <a:rPr lang="zh-TW" altLang="en-US" smtClean="0"/>
+              <a:rPr lang="zh-TW" altLang="en-US"/>
               <a:t>按一下以編輯母片標題樣式</a:t>
             </a:r>
-            <a:endParaRPr lang="zh-TW" altLang="en-US"/>
           </a:p>
         </p:txBody>
       </p:sp>
@@ -272,10 +287,9 @@
           </a:lstStyle>
           <a:p>
             <a:r>
-              <a:rPr lang="zh-TW" altLang="en-US" smtClean="0"/>
+              <a:rPr lang="zh-TW" altLang="en-US"/>
               <a:t>按一下以編輯母片副標題樣式</a:t>
             </a:r>
-            <a:endParaRPr lang="zh-TW" altLang="en-US"/>
           </a:p>
         </p:txBody>
       </p:sp>
@@ -296,7 +310,7 @@
           <a:p>
             <a:fld id="{F1CB83EB-EB33-4DFA-9BDA-78308EC18029}" type="datetimeFigureOut">
               <a:rPr lang="zh-TW" altLang="en-US" smtClean="0"/>
-              <a:t>2024/9/24</a:t>
+              <a:t>2024/10/5</a:t>
             </a:fld>
             <a:endParaRPr lang="zh-TW" altLang="en-US"/>
           </a:p>
@@ -385,10 +399,9 @@
           <a:lstStyle/>
           <a:p>
             <a:r>
-              <a:rPr lang="zh-TW" altLang="en-US" smtClean="0"/>
+              <a:rPr lang="zh-TW" altLang="en-US"/>
               <a:t>按一下以編輯母片標題樣式</a:t>
             </a:r>
-            <a:endParaRPr lang="zh-TW" altLang="en-US"/>
           </a:p>
         </p:txBody>
       </p:sp>
@@ -409,38 +422,37 @@
           <a:p>
             <a:pPr lvl="0"/>
             <a:r>
-              <a:rPr lang="zh-TW" altLang="en-US" smtClean="0"/>
+              <a:rPr lang="zh-TW" altLang="en-US"/>
               <a:t>按一下以編輯母片文字樣式</a:t>
             </a:r>
           </a:p>
           <a:p>
             <a:pPr lvl="1"/>
             <a:r>
-              <a:rPr lang="zh-TW" altLang="en-US" smtClean="0"/>
+              <a:rPr lang="zh-TW" altLang="en-US"/>
               <a:t>第二層</a:t>
             </a:r>
           </a:p>
           <a:p>
             <a:pPr lvl="2"/>
             <a:r>
-              <a:rPr lang="zh-TW" altLang="en-US" smtClean="0"/>
+              <a:rPr lang="zh-TW" altLang="en-US"/>
               <a:t>第三層</a:t>
             </a:r>
           </a:p>
           <a:p>
             <a:pPr lvl="3"/>
             <a:r>
-              <a:rPr lang="zh-TW" altLang="en-US" smtClean="0"/>
+              <a:rPr lang="zh-TW" altLang="en-US"/>
               <a:t>第四層</a:t>
             </a:r>
           </a:p>
           <a:p>
             <a:pPr lvl="4"/>
             <a:r>
-              <a:rPr lang="zh-TW" altLang="en-US" smtClean="0"/>
+              <a:rPr lang="zh-TW" altLang="en-US"/>
               <a:t>第五層</a:t>
             </a:r>
-            <a:endParaRPr lang="zh-TW" altLang="en-US"/>
           </a:p>
         </p:txBody>
       </p:sp>
@@ -461,7 +473,7 @@
           <a:p>
             <a:fld id="{F1CB83EB-EB33-4DFA-9BDA-78308EC18029}" type="datetimeFigureOut">
               <a:rPr lang="zh-TW" altLang="en-US" smtClean="0"/>
-              <a:t>2024/9/24</a:t>
+              <a:t>2024/10/5</a:t>
             </a:fld>
             <a:endParaRPr lang="zh-TW" altLang="en-US"/>
           </a:p>
@@ -555,10 +567,9 @@
           <a:lstStyle/>
           <a:p>
             <a:r>
-              <a:rPr lang="zh-TW" altLang="en-US" smtClean="0"/>
+              <a:rPr lang="zh-TW" altLang="en-US"/>
               <a:t>按一下以編輯母片標題樣式</a:t>
             </a:r>
-            <a:endParaRPr lang="zh-TW" altLang="en-US"/>
           </a:p>
         </p:txBody>
       </p:sp>
@@ -584,38 +595,37 @@
           <a:p>
             <a:pPr lvl="0"/>
             <a:r>
-              <a:rPr lang="zh-TW" altLang="en-US" smtClean="0"/>
+              <a:rPr lang="zh-TW" altLang="en-US"/>
               <a:t>按一下以編輯母片文字樣式</a:t>
             </a:r>
           </a:p>
           <a:p>
             <a:pPr lvl="1"/>
             <a:r>
-              <a:rPr lang="zh-TW" altLang="en-US" smtClean="0"/>
+              <a:rPr lang="zh-TW" altLang="en-US"/>
               <a:t>第二層</a:t>
             </a:r>
           </a:p>
           <a:p>
             <a:pPr lvl="2"/>
             <a:r>
-              <a:rPr lang="zh-TW" altLang="en-US" smtClean="0"/>
+              <a:rPr lang="zh-TW" altLang="en-US"/>
               <a:t>第三層</a:t>
             </a:r>
           </a:p>
           <a:p>
             <a:pPr lvl="3"/>
             <a:r>
-              <a:rPr lang="zh-TW" altLang="en-US" smtClean="0"/>
+              <a:rPr lang="zh-TW" altLang="en-US"/>
               <a:t>第四層</a:t>
             </a:r>
           </a:p>
           <a:p>
             <a:pPr lvl="4"/>
             <a:r>
-              <a:rPr lang="zh-TW" altLang="en-US" smtClean="0"/>
+              <a:rPr lang="zh-TW" altLang="en-US"/>
               <a:t>第五層</a:t>
             </a:r>
-            <a:endParaRPr lang="zh-TW" altLang="en-US"/>
           </a:p>
         </p:txBody>
       </p:sp>
@@ -636,7 +646,7 @@
           <a:p>
             <a:fld id="{F1CB83EB-EB33-4DFA-9BDA-78308EC18029}" type="datetimeFigureOut">
               <a:rPr lang="zh-TW" altLang="en-US" smtClean="0"/>
-              <a:t>2024/9/24</a:t>
+              <a:t>2024/10/5</a:t>
             </a:fld>
             <a:endParaRPr lang="zh-TW" altLang="en-US"/>
           </a:p>
@@ -725,10 +735,9 @@
           <a:lstStyle/>
           <a:p>
             <a:r>
-              <a:rPr lang="zh-TW" altLang="en-US" smtClean="0"/>
+              <a:rPr lang="zh-TW" altLang="en-US"/>
               <a:t>按一下以編輯母片標題樣式</a:t>
             </a:r>
-            <a:endParaRPr lang="zh-TW" altLang="en-US"/>
           </a:p>
         </p:txBody>
       </p:sp>
@@ -749,38 +758,37 @@
           <a:p>
             <a:pPr lvl="0"/>
             <a:r>
-              <a:rPr lang="zh-TW" altLang="en-US" smtClean="0"/>
+              <a:rPr lang="zh-TW" altLang="en-US"/>
               <a:t>按一下以編輯母片文字樣式</a:t>
             </a:r>
           </a:p>
           <a:p>
             <a:pPr lvl="1"/>
             <a:r>
-              <a:rPr lang="zh-TW" altLang="en-US" smtClean="0"/>
+              <a:rPr lang="zh-TW" altLang="en-US"/>
               <a:t>第二層</a:t>
             </a:r>
           </a:p>
           <a:p>
             <a:pPr lvl="2"/>
             <a:r>
-              <a:rPr lang="zh-TW" altLang="en-US" smtClean="0"/>
+              <a:rPr lang="zh-TW" altLang="en-US"/>
               <a:t>第三層</a:t>
             </a:r>
           </a:p>
           <a:p>
             <a:pPr lvl="3"/>
             <a:r>
-              <a:rPr lang="zh-TW" altLang="en-US" smtClean="0"/>
+              <a:rPr lang="zh-TW" altLang="en-US"/>
               <a:t>第四層</a:t>
             </a:r>
           </a:p>
           <a:p>
             <a:pPr lvl="4"/>
             <a:r>
-              <a:rPr lang="zh-TW" altLang="en-US" smtClean="0"/>
+              <a:rPr lang="zh-TW" altLang="en-US"/>
               <a:t>第五層</a:t>
             </a:r>
-            <a:endParaRPr lang="zh-TW" altLang="en-US"/>
           </a:p>
         </p:txBody>
       </p:sp>
@@ -801,7 +809,7 @@
           <a:p>
             <a:fld id="{F1CB83EB-EB33-4DFA-9BDA-78308EC18029}" type="datetimeFigureOut">
               <a:rPr lang="zh-TW" altLang="en-US" smtClean="0"/>
-              <a:t>2024/9/24</a:t>
+              <a:t>2024/10/5</a:t>
             </a:fld>
             <a:endParaRPr lang="zh-TW" altLang="en-US"/>
           </a:p>
@@ -899,10 +907,9 @@
           </a:lstStyle>
           <a:p>
             <a:r>
-              <a:rPr lang="zh-TW" altLang="en-US" smtClean="0"/>
+              <a:rPr lang="zh-TW" altLang="en-US"/>
               <a:t>按一下以編輯母片標題樣式</a:t>
             </a:r>
-            <a:endParaRPr lang="zh-TW" altLang="en-US"/>
           </a:p>
         </p:txBody>
       </p:sp>
@@ -1019,7 +1026,7 @@
           <a:p>
             <a:pPr lvl="0"/>
             <a:r>
-              <a:rPr lang="zh-TW" altLang="en-US" smtClean="0"/>
+              <a:rPr lang="zh-TW" altLang="en-US"/>
               <a:t>按一下以編輯母片文字樣式</a:t>
             </a:r>
           </a:p>
@@ -1042,7 +1049,7 @@
           <a:p>
             <a:fld id="{F1CB83EB-EB33-4DFA-9BDA-78308EC18029}" type="datetimeFigureOut">
               <a:rPr lang="zh-TW" altLang="en-US" smtClean="0"/>
-              <a:t>2024/9/24</a:t>
+              <a:t>2024/10/5</a:t>
             </a:fld>
             <a:endParaRPr lang="zh-TW" altLang="en-US"/>
           </a:p>
@@ -1131,10 +1138,9 @@
           <a:lstStyle/>
           <a:p>
             <a:r>
-              <a:rPr lang="zh-TW" altLang="en-US" smtClean="0"/>
+              <a:rPr lang="zh-TW" altLang="en-US"/>
               <a:t>按一下以編輯母片標題樣式</a:t>
             </a:r>
-            <a:endParaRPr lang="zh-TW" altLang="en-US"/>
           </a:p>
         </p:txBody>
       </p:sp>
@@ -1188,38 +1194,37 @@
           <a:p>
             <a:pPr lvl="0"/>
             <a:r>
-              <a:rPr lang="zh-TW" altLang="en-US" smtClean="0"/>
+              <a:rPr lang="zh-TW" altLang="en-US"/>
               <a:t>按一下以編輯母片文字樣式</a:t>
             </a:r>
           </a:p>
           <a:p>
             <a:pPr lvl="1"/>
             <a:r>
-              <a:rPr lang="zh-TW" altLang="en-US" smtClean="0"/>
+              <a:rPr lang="zh-TW" altLang="en-US"/>
               <a:t>第二層</a:t>
             </a:r>
           </a:p>
           <a:p>
             <a:pPr lvl="2"/>
             <a:r>
-              <a:rPr lang="zh-TW" altLang="en-US" smtClean="0"/>
+              <a:rPr lang="zh-TW" altLang="en-US"/>
               <a:t>第三層</a:t>
             </a:r>
           </a:p>
           <a:p>
             <a:pPr lvl="3"/>
             <a:r>
-              <a:rPr lang="zh-TW" altLang="en-US" smtClean="0"/>
+              <a:rPr lang="zh-TW" altLang="en-US"/>
               <a:t>第四層</a:t>
             </a:r>
           </a:p>
           <a:p>
             <a:pPr lvl="4"/>
             <a:r>
-              <a:rPr lang="zh-TW" altLang="en-US" smtClean="0"/>
+              <a:rPr lang="zh-TW" altLang="en-US"/>
               <a:t>第五層</a:t>
             </a:r>
-            <a:endParaRPr lang="zh-TW" altLang="en-US"/>
           </a:p>
         </p:txBody>
       </p:sp>
@@ -1273,38 +1278,37 @@
           <a:p>
             <a:pPr lvl="0"/>
             <a:r>
-              <a:rPr lang="zh-TW" altLang="en-US" smtClean="0"/>
+              <a:rPr lang="zh-TW" altLang="en-US"/>
               <a:t>按一下以編輯母片文字樣式</a:t>
             </a:r>
           </a:p>
           <a:p>
             <a:pPr lvl="1"/>
             <a:r>
-              <a:rPr lang="zh-TW" altLang="en-US" smtClean="0"/>
+              <a:rPr lang="zh-TW" altLang="en-US"/>
               <a:t>第二層</a:t>
             </a:r>
           </a:p>
           <a:p>
             <a:pPr lvl="2"/>
             <a:r>
-              <a:rPr lang="zh-TW" altLang="en-US" smtClean="0"/>
+              <a:rPr lang="zh-TW" altLang="en-US"/>
               <a:t>第三層</a:t>
             </a:r>
           </a:p>
           <a:p>
             <a:pPr lvl="3"/>
             <a:r>
-              <a:rPr lang="zh-TW" altLang="en-US" smtClean="0"/>
+              <a:rPr lang="zh-TW" altLang="en-US"/>
               <a:t>第四層</a:t>
             </a:r>
           </a:p>
           <a:p>
             <a:pPr lvl="4"/>
             <a:r>
-              <a:rPr lang="zh-TW" altLang="en-US" smtClean="0"/>
+              <a:rPr lang="zh-TW" altLang="en-US"/>
               <a:t>第五層</a:t>
             </a:r>
-            <a:endParaRPr lang="zh-TW" altLang="en-US"/>
           </a:p>
         </p:txBody>
       </p:sp>
@@ -1325,7 +1329,7 @@
           <a:p>
             <a:fld id="{F1CB83EB-EB33-4DFA-9BDA-78308EC18029}" type="datetimeFigureOut">
               <a:rPr lang="zh-TW" altLang="en-US" smtClean="0"/>
-              <a:t>2024/9/24</a:t>
+              <a:t>2024/10/5</a:t>
             </a:fld>
             <a:endParaRPr lang="zh-TW" altLang="en-US"/>
           </a:p>
@@ -1418,10 +1422,9 @@
           </a:lstStyle>
           <a:p>
             <a:r>
-              <a:rPr lang="zh-TW" altLang="en-US" smtClean="0"/>
+              <a:rPr lang="zh-TW" altLang="en-US"/>
               <a:t>按一下以編輯母片標題樣式</a:t>
             </a:r>
-            <a:endParaRPr lang="zh-TW" altLang="en-US"/>
           </a:p>
         </p:txBody>
       </p:sp>
@@ -1484,7 +1487,7 @@
           <a:p>
             <a:pPr lvl="0"/>
             <a:r>
-              <a:rPr lang="zh-TW" altLang="en-US" smtClean="0"/>
+              <a:rPr lang="zh-TW" altLang="en-US"/>
               <a:t>按一下以編輯母片文字樣式</a:t>
             </a:r>
           </a:p>
@@ -1540,38 +1543,37 @@
           <a:p>
             <a:pPr lvl="0"/>
             <a:r>
-              <a:rPr lang="zh-TW" altLang="en-US" smtClean="0"/>
+              <a:rPr lang="zh-TW" altLang="en-US"/>
               <a:t>按一下以編輯母片文字樣式</a:t>
             </a:r>
           </a:p>
           <a:p>
             <a:pPr lvl="1"/>
             <a:r>
-              <a:rPr lang="zh-TW" altLang="en-US" smtClean="0"/>
+              <a:rPr lang="zh-TW" altLang="en-US"/>
               <a:t>第二層</a:t>
             </a:r>
           </a:p>
           <a:p>
             <a:pPr lvl="2"/>
             <a:r>
-              <a:rPr lang="zh-TW" altLang="en-US" smtClean="0"/>
+              <a:rPr lang="zh-TW" altLang="en-US"/>
               <a:t>第三層</a:t>
             </a:r>
           </a:p>
           <a:p>
             <a:pPr lvl="3"/>
             <a:r>
-              <a:rPr lang="zh-TW" altLang="en-US" smtClean="0"/>
+              <a:rPr lang="zh-TW" altLang="en-US"/>
               <a:t>第四層</a:t>
             </a:r>
           </a:p>
           <a:p>
             <a:pPr lvl="4"/>
             <a:r>
-              <a:rPr lang="zh-TW" altLang="en-US" smtClean="0"/>
+              <a:rPr lang="zh-TW" altLang="en-US"/>
               <a:t>第五層</a:t>
             </a:r>
-            <a:endParaRPr lang="zh-TW" altLang="en-US"/>
           </a:p>
         </p:txBody>
       </p:sp>
@@ -1634,7 +1636,7 @@
           <a:p>
             <a:pPr lvl="0"/>
             <a:r>
-              <a:rPr lang="zh-TW" altLang="en-US" smtClean="0"/>
+              <a:rPr lang="zh-TW" altLang="en-US"/>
               <a:t>按一下以編輯母片文字樣式</a:t>
             </a:r>
           </a:p>
@@ -1690,38 +1692,37 @@
           <a:p>
             <a:pPr lvl="0"/>
             <a:r>
-              <a:rPr lang="zh-TW" altLang="en-US" smtClean="0"/>
+              <a:rPr lang="zh-TW" altLang="en-US"/>
               <a:t>按一下以編輯母片文字樣式</a:t>
             </a:r>
           </a:p>
           <a:p>
             <a:pPr lvl="1"/>
             <a:r>
-              <a:rPr lang="zh-TW" altLang="en-US" smtClean="0"/>
+              <a:rPr lang="zh-TW" altLang="en-US"/>
               <a:t>第二層</a:t>
             </a:r>
           </a:p>
           <a:p>
             <a:pPr lvl="2"/>
             <a:r>
-              <a:rPr lang="zh-TW" altLang="en-US" smtClean="0"/>
+              <a:rPr lang="zh-TW" altLang="en-US"/>
               <a:t>第三層</a:t>
             </a:r>
           </a:p>
           <a:p>
             <a:pPr lvl="3"/>
             <a:r>
-              <a:rPr lang="zh-TW" altLang="en-US" smtClean="0"/>
+              <a:rPr lang="zh-TW" altLang="en-US"/>
               <a:t>第四層</a:t>
             </a:r>
           </a:p>
           <a:p>
             <a:pPr lvl="4"/>
             <a:r>
-              <a:rPr lang="zh-TW" altLang="en-US" smtClean="0"/>
+              <a:rPr lang="zh-TW" altLang="en-US"/>
               <a:t>第五層</a:t>
             </a:r>
-            <a:endParaRPr lang="zh-TW" altLang="en-US"/>
           </a:p>
         </p:txBody>
       </p:sp>
@@ -1742,7 +1743,7 @@
           <a:p>
             <a:fld id="{F1CB83EB-EB33-4DFA-9BDA-78308EC18029}" type="datetimeFigureOut">
               <a:rPr lang="zh-TW" altLang="en-US" smtClean="0"/>
-              <a:t>2024/9/24</a:t>
+              <a:t>2024/10/5</a:t>
             </a:fld>
             <a:endParaRPr lang="zh-TW" altLang="en-US"/>
           </a:p>
@@ -1831,10 +1832,9 @@
           <a:lstStyle/>
           <a:p>
             <a:r>
-              <a:rPr lang="zh-TW" altLang="en-US" smtClean="0"/>
+              <a:rPr lang="zh-TW" altLang="en-US"/>
               <a:t>按一下以編輯母片標題樣式</a:t>
             </a:r>
-            <a:endParaRPr lang="zh-TW" altLang="en-US"/>
           </a:p>
         </p:txBody>
       </p:sp>
@@ -1855,7 +1855,7 @@
           <a:p>
             <a:fld id="{F1CB83EB-EB33-4DFA-9BDA-78308EC18029}" type="datetimeFigureOut">
               <a:rPr lang="zh-TW" altLang="en-US" smtClean="0"/>
-              <a:t>2024/9/24</a:t>
+              <a:t>2024/10/5</a:t>
             </a:fld>
             <a:endParaRPr lang="zh-TW" altLang="en-US"/>
           </a:p>
@@ -1945,7 +1945,7 @@
           <a:p>
             <a:fld id="{F1CB83EB-EB33-4DFA-9BDA-78308EC18029}" type="datetimeFigureOut">
               <a:rPr lang="zh-TW" altLang="en-US" smtClean="0"/>
-              <a:t>2024/9/24</a:t>
+              <a:t>2024/10/5</a:t>
             </a:fld>
             <a:endParaRPr lang="zh-TW" altLang="en-US"/>
           </a:p>
@@ -2043,10 +2043,9 @@
           </a:lstStyle>
           <a:p>
             <a:r>
-              <a:rPr lang="zh-TW" altLang="en-US" smtClean="0"/>
+              <a:rPr lang="zh-TW" altLang="en-US"/>
               <a:t>按一下以編輯母片標題樣式</a:t>
             </a:r>
-            <a:endParaRPr lang="zh-TW" altLang="en-US"/>
           </a:p>
         </p:txBody>
       </p:sp>
@@ -2100,38 +2099,37 @@
           <a:p>
             <a:pPr lvl="0"/>
             <a:r>
-              <a:rPr lang="zh-TW" altLang="en-US" smtClean="0"/>
+              <a:rPr lang="zh-TW" altLang="en-US"/>
               <a:t>按一下以編輯母片文字樣式</a:t>
             </a:r>
           </a:p>
           <a:p>
             <a:pPr lvl="1"/>
             <a:r>
-              <a:rPr lang="zh-TW" altLang="en-US" smtClean="0"/>
+              <a:rPr lang="zh-TW" altLang="en-US"/>
               <a:t>第二層</a:t>
             </a:r>
           </a:p>
           <a:p>
             <a:pPr lvl="2"/>
             <a:r>
-              <a:rPr lang="zh-TW" altLang="en-US" smtClean="0"/>
+              <a:rPr lang="zh-TW" altLang="en-US"/>
               <a:t>第三層</a:t>
             </a:r>
           </a:p>
           <a:p>
             <a:pPr lvl="3"/>
             <a:r>
-              <a:rPr lang="zh-TW" altLang="en-US" smtClean="0"/>
+              <a:rPr lang="zh-TW" altLang="en-US"/>
               <a:t>第四層</a:t>
             </a:r>
           </a:p>
           <a:p>
             <a:pPr lvl="4"/>
             <a:r>
-              <a:rPr lang="zh-TW" altLang="en-US" smtClean="0"/>
+              <a:rPr lang="zh-TW" altLang="en-US"/>
               <a:t>第五層</a:t>
             </a:r>
-            <a:endParaRPr lang="zh-TW" altLang="en-US"/>
           </a:p>
         </p:txBody>
       </p:sp>
@@ -2194,7 +2192,7 @@
           <a:p>
             <a:pPr lvl="0"/>
             <a:r>
-              <a:rPr lang="zh-TW" altLang="en-US" smtClean="0"/>
+              <a:rPr lang="zh-TW" altLang="en-US"/>
               <a:t>按一下以編輯母片文字樣式</a:t>
             </a:r>
           </a:p>
@@ -2217,7 +2215,7 @@
           <a:p>
             <a:fld id="{F1CB83EB-EB33-4DFA-9BDA-78308EC18029}" type="datetimeFigureOut">
               <a:rPr lang="zh-TW" altLang="en-US" smtClean="0"/>
-              <a:t>2024/9/24</a:t>
+              <a:t>2024/10/5</a:t>
             </a:fld>
             <a:endParaRPr lang="zh-TW" altLang="en-US"/>
           </a:p>
@@ -2315,10 +2313,9 @@
           </a:lstStyle>
           <a:p>
             <a:r>
-              <a:rPr lang="zh-TW" altLang="en-US" smtClean="0"/>
+              <a:rPr lang="zh-TW" altLang="en-US"/>
               <a:t>按一下以編輯母片標題樣式</a:t>
             </a:r>
-            <a:endParaRPr lang="zh-TW" altLang="en-US"/>
           </a:p>
         </p:txBody>
       </p:sp>
@@ -2380,10 +2377,9 @@
           </a:lstStyle>
           <a:p>
             <a:r>
-              <a:rPr lang="zh-TW" altLang="en-US" smtClean="0"/>
+              <a:rPr lang="zh-TW" altLang="en-US"/>
               <a:t>按一下圖示以新增圖片</a:t>
             </a:r>
-            <a:endParaRPr lang="zh-TW" altLang="en-US"/>
           </a:p>
         </p:txBody>
       </p:sp>
@@ -2446,7 +2442,7 @@
           <a:p>
             <a:pPr lvl="0"/>
             <a:r>
-              <a:rPr lang="zh-TW" altLang="en-US" smtClean="0"/>
+              <a:rPr lang="zh-TW" altLang="en-US"/>
               <a:t>按一下以編輯母片文字樣式</a:t>
             </a:r>
           </a:p>
@@ -2469,7 +2465,7 @@
           <a:p>
             <a:fld id="{F1CB83EB-EB33-4DFA-9BDA-78308EC18029}" type="datetimeFigureOut">
               <a:rPr lang="zh-TW" altLang="en-US" smtClean="0"/>
-              <a:t>2024/9/24</a:t>
+              <a:t>2024/10/5</a:t>
             </a:fld>
             <a:endParaRPr lang="zh-TW" altLang="en-US"/>
           </a:p>
@@ -2578,10 +2574,9 @@
           <a:lstStyle/>
           <a:p>
             <a:r>
-              <a:rPr lang="zh-TW" altLang="en-US" smtClean="0"/>
+              <a:rPr lang="zh-TW" altLang="en-US"/>
               <a:t>按一下以編輯母片標題樣式</a:t>
             </a:r>
-            <a:endParaRPr lang="zh-TW" altLang="en-US"/>
           </a:p>
         </p:txBody>
       </p:sp>
@@ -2612,38 +2607,37 @@
           <a:p>
             <a:pPr lvl="0"/>
             <a:r>
-              <a:rPr lang="zh-TW" altLang="en-US" smtClean="0"/>
+              <a:rPr lang="zh-TW" altLang="en-US"/>
               <a:t>按一下以編輯母片文字樣式</a:t>
             </a:r>
           </a:p>
           <a:p>
             <a:pPr lvl="1"/>
             <a:r>
-              <a:rPr lang="zh-TW" altLang="en-US" smtClean="0"/>
+              <a:rPr lang="zh-TW" altLang="en-US"/>
               <a:t>第二層</a:t>
             </a:r>
           </a:p>
           <a:p>
             <a:pPr lvl="2"/>
             <a:r>
-              <a:rPr lang="zh-TW" altLang="en-US" smtClean="0"/>
+              <a:rPr lang="zh-TW" altLang="en-US"/>
               <a:t>第三層</a:t>
             </a:r>
           </a:p>
           <a:p>
             <a:pPr lvl="3"/>
             <a:r>
-              <a:rPr lang="zh-TW" altLang="en-US" smtClean="0"/>
+              <a:rPr lang="zh-TW" altLang="en-US"/>
               <a:t>第四層</a:t>
             </a:r>
           </a:p>
           <a:p>
             <a:pPr lvl="4"/>
             <a:r>
-              <a:rPr lang="zh-TW" altLang="en-US" smtClean="0"/>
+              <a:rPr lang="zh-TW" altLang="en-US"/>
               <a:t>第五層</a:t>
             </a:r>
-            <a:endParaRPr lang="zh-TW" altLang="en-US"/>
           </a:p>
         </p:txBody>
       </p:sp>
@@ -2682,7 +2676,7 @@
           <a:p>
             <a:fld id="{F1CB83EB-EB33-4DFA-9BDA-78308EC18029}" type="datetimeFigureOut">
               <a:rPr lang="zh-TW" altLang="en-US" smtClean="0"/>
-              <a:t>2024/9/24</a:t>
+              <a:t>2024/10/5</a:t>
             </a:fld>
             <a:endParaRPr lang="zh-TW" altLang="en-US"/>
           </a:p>
@@ -3075,7 +3069,7 @@
           <a:lstStyle/>
           <a:p>
             <a:r>
-              <a:rPr lang="zh-CN" altLang="en-US" sz="5400" b="1" i="1" dirty="0" smtClean="0">
+              <a:rPr lang="zh-CN" altLang="en-US" sz="5400" b="1" i="1" dirty="0">
                 <a:solidFill>
                   <a:srgbClr val="660033"/>
                 </a:solidFill>
@@ -3113,13 +3107,6 @@
   <p:clrMapOvr>
     <a:masterClrMapping/>
   </p:clrMapOvr>
-  <p:timing>
-    <p:tnLst>
-      <p:par>
-        <p:cTn id="1" dur="indefinite" restart="never" nodeType="tmRoot"/>
-      </p:par>
-    </p:tnLst>
-  </p:timing>
 </p:sld>
 </file>
 
@@ -3166,56 +3153,16 @@
               <a:buNone/>
             </a:pPr>
             <a:r>
-              <a:rPr lang="zh-TW" altLang="en-US" sz="4800" b="1" dirty="0" smtClean="0">
+              <a:rPr lang="zh-TW" altLang="en-US" sz="4800" b="1" dirty="0">
                 <a:solidFill>
                   <a:srgbClr val="660033"/>
                 </a:solidFill>
                 <a:latin typeface="微軟正黑體" pitchFamily="34" charset="-120"/>
                 <a:ea typeface="微軟正黑體" pitchFamily="34" charset="-120"/>
               </a:rPr>
-              <a:t>立志</a:t>
-            </a:r>
-            <a:r>
-              <a:rPr lang="zh-TW" altLang="en-US" sz="4800" b="1" dirty="0" smtClean="0">
-                <a:solidFill>
-                  <a:srgbClr val="660033"/>
-                </a:solidFill>
-                <a:latin typeface="微軟正黑體" pitchFamily="34" charset="-120"/>
-                <a:ea typeface="微軟正黑體" pitchFamily="34" charset="-120"/>
-              </a:rPr>
-              <a:t>效法基督 </a:t>
-            </a:r>
-            <a:r>
-              <a:rPr lang="zh-TW" altLang="en-US" sz="4800" b="1" dirty="0" smtClean="0">
-                <a:solidFill>
-                  <a:srgbClr val="660033"/>
-                </a:solidFill>
-                <a:latin typeface="微軟正黑體" pitchFamily="34" charset="-120"/>
-                <a:ea typeface="微軟正黑體" pitchFamily="34" charset="-120"/>
-              </a:rPr>
-              <a:t> 忠於</a:t>
-            </a:r>
-            <a:r>
-              <a:rPr lang="zh-TW" altLang="en-US" sz="4800" b="1" dirty="0" smtClean="0">
-                <a:solidFill>
-                  <a:srgbClr val="660033"/>
-                </a:solidFill>
-                <a:latin typeface="微軟正黑體" pitchFamily="34" charset="-120"/>
-                <a:ea typeface="微軟正黑體" pitchFamily="34" charset="-120"/>
-              </a:rPr>
-              <a:t>所</a:t>
-            </a:r>
-            <a:r>
-              <a:rPr lang="zh-TW" altLang="en-US" sz="4800" b="1" dirty="0" smtClean="0">
-                <a:solidFill>
-                  <a:srgbClr val="660033"/>
-                </a:solidFill>
-                <a:latin typeface="微軟正黑體" pitchFamily="34" charset="-120"/>
-                <a:ea typeface="微軟正黑體" pitchFamily="34" charset="-120"/>
-              </a:rPr>
-              <a:t>托</a:t>
-            </a:r>
-            <a:endParaRPr lang="en-US" altLang="zh-TW" sz="4800" b="1" dirty="0" smtClean="0">
+              <a:t>立志效法基督  忠於所托</a:t>
+            </a:r>
+            <a:endParaRPr lang="en-US" altLang="zh-TW" sz="4800" b="1" dirty="0">
               <a:solidFill>
                 <a:srgbClr val="660033"/>
               </a:solidFill>
@@ -3228,46 +3175,16 @@
               <a:buNone/>
             </a:pPr>
             <a:r>
-              <a:rPr lang="zh-TW" altLang="en-US" sz="4800" b="1" dirty="0" smtClean="0">
+              <a:rPr lang="zh-TW" altLang="en-US" sz="4800" b="1" dirty="0">
                 <a:solidFill>
                   <a:srgbClr val="660033"/>
                 </a:solidFill>
                 <a:latin typeface="微軟正黑體" pitchFamily="34" charset="-120"/>
                 <a:ea typeface="微軟正黑體" pitchFamily="34" charset="-120"/>
               </a:rPr>
-              <a:t>齊</a:t>
-            </a:r>
-            <a:r>
-              <a:rPr lang="zh-TW" altLang="en-US" sz="4800" b="1" dirty="0" smtClean="0">
-                <a:solidFill>
-                  <a:srgbClr val="660033"/>
-                </a:solidFill>
-                <a:latin typeface="微軟正黑體" pitchFamily="34" charset="-120"/>
-                <a:ea typeface="微軟正黑體" pitchFamily="34" charset="-120"/>
-              </a:rPr>
-              <a:t>奔標竿 </a:t>
-            </a:r>
-            <a:r>
-              <a:rPr lang="zh-TW" altLang="en-US" sz="4800" b="1" dirty="0" smtClean="0">
-                <a:solidFill>
-                  <a:srgbClr val="660033"/>
-                </a:solidFill>
-                <a:latin typeface="微軟正黑體" pitchFamily="34" charset="-120"/>
-                <a:ea typeface="微軟正黑體" pitchFamily="34" charset="-120"/>
-              </a:rPr>
-              <a:t> 舉目</a:t>
-            </a:r>
-            <a:r>
-              <a:rPr lang="zh-TW" altLang="en-US" sz="4800" b="1" dirty="0" smtClean="0">
-                <a:solidFill>
-                  <a:srgbClr val="660033"/>
-                </a:solidFill>
-                <a:latin typeface="微軟正黑體" pitchFamily="34" charset="-120"/>
-                <a:ea typeface="微軟正黑體" pitchFamily="34" charset="-120"/>
-              </a:rPr>
-              <a:t>觀看莊稼已熟</a:t>
-            </a:r>
-            <a:endParaRPr lang="en-US" altLang="zh-TW" sz="4800" b="1" dirty="0" smtClean="0">
+              <a:t>齊奔標竿  舉目觀看莊稼已熟</a:t>
+            </a:r>
+            <a:endParaRPr lang="en-US" altLang="zh-TW" sz="4800" b="1" dirty="0">
               <a:solidFill>
                 <a:srgbClr val="660033"/>
               </a:solidFill>
@@ -3301,7 +3218,7 @@
           <a:p>
             <a:pPr algn="ctr"/>
             <a:r>
-              <a:rPr lang="en-US" sz="2400" b="1" dirty="0" smtClean="0">
+              <a:rPr lang="en-US" sz="2400" b="1" dirty="0">
                 <a:solidFill>
                   <a:srgbClr val="660033"/>
                 </a:solidFill>
@@ -3311,17 +3228,17 @@
               <a:t>( </a:t>
             </a:r>
             <a:r>
-              <a:rPr lang="zh-CN" altLang="en-US" sz="2400" b="1" dirty="0" smtClean="0">
+              <a:rPr lang="zh-CN" altLang="en-US" sz="2400" b="1" dirty="0">
                 <a:solidFill>
                   <a:srgbClr val="660033"/>
                 </a:solidFill>
                 <a:latin typeface="Microsoft JhengHei" panose="020B0604030504040204" pitchFamily="34" charset="-120"/>
                 <a:ea typeface="Microsoft JhengHei" panose="020B0604030504040204" pitchFamily="34" charset="-120"/>
               </a:rPr>
-              <a:t>正</a:t>
-            </a:r>
-            <a:r>
-              <a:rPr lang="en-US" sz="2400" b="1" dirty="0" smtClean="0">
+              <a:t>正歌</a:t>
+            </a:r>
+            <a:r>
+              <a:rPr lang="en-US" sz="2400" b="1" dirty="0">
                 <a:solidFill>
                   <a:srgbClr val="660033"/>
                 </a:solidFill>
@@ -3344,13 +3261,6 @@
   <p:clrMapOvr>
     <a:masterClrMapping/>
   </p:clrMapOvr>
-  <p:timing>
-    <p:tnLst>
-      <p:par>
-        <p:cTn id="1" dur="indefinite" restart="never" nodeType="tmRoot"/>
-      </p:par>
-    </p:tnLst>
-  </p:timing>
 </p:sld>
 </file>
 
@@ -3397,46 +3307,16 @@
               <a:buNone/>
             </a:pPr>
             <a:r>
-              <a:rPr lang="zh-TW" altLang="en-US" sz="4800" b="1" dirty="0" smtClean="0">
+              <a:rPr lang="zh-TW" altLang="en-US" sz="4800" b="1" dirty="0">
                 <a:solidFill>
                   <a:srgbClr val="660033"/>
                 </a:solidFill>
                 <a:latin typeface="微軟正黑體" pitchFamily="34" charset="-120"/>
                 <a:ea typeface="微軟正黑體" pitchFamily="34" charset="-120"/>
               </a:rPr>
-              <a:t>願意</a:t>
-            </a:r>
-            <a:r>
-              <a:rPr lang="zh-TW" altLang="en-US" sz="4800" b="1" dirty="0" smtClean="0">
-                <a:solidFill>
-                  <a:srgbClr val="660033"/>
-                </a:solidFill>
-                <a:latin typeface="微軟正黑體" pitchFamily="34" charset="-120"/>
-                <a:ea typeface="微軟正黑體" pitchFamily="34" charset="-120"/>
-              </a:rPr>
-              <a:t>被</a:t>
-            </a:r>
-            <a:r>
-              <a:rPr lang="zh-TW" altLang="en-US" sz="4800" b="1" dirty="0" smtClean="0">
-                <a:solidFill>
-                  <a:srgbClr val="660033"/>
-                </a:solidFill>
-                <a:latin typeface="微軟正黑體" pitchFamily="34" charset="-120"/>
-                <a:ea typeface="微軟正黑體" pitchFamily="34" charset="-120"/>
-              </a:rPr>
-              <a:t>祢</a:t>
-            </a:r>
-            <a:r>
-              <a:rPr lang="zh-TW" altLang="en-US" sz="4800" b="1" dirty="0" smtClean="0">
-                <a:solidFill>
-                  <a:srgbClr val="660033"/>
-                </a:solidFill>
-                <a:latin typeface="微軟正黑體" pitchFamily="34" charset="-120"/>
-                <a:ea typeface="微軟正黑體" pitchFamily="34" charset="-120"/>
-              </a:rPr>
-              <a:t>更新</a:t>
-            </a:r>
-            <a:endParaRPr lang="en-US" altLang="zh-TW" sz="4800" b="1" dirty="0" smtClean="0">
+              <a:t>願意被祢更新</a:t>
+            </a:r>
+            <a:endParaRPr lang="en-US" altLang="zh-TW" sz="4800" b="1" dirty="0">
               <a:solidFill>
                 <a:srgbClr val="660033"/>
               </a:solidFill>
@@ -3449,7 +3329,7 @@
               <a:buNone/>
             </a:pPr>
             <a:r>
-              <a:rPr lang="zh-TW" altLang="en-US" sz="4800" b="1" dirty="0" smtClean="0">
+              <a:rPr lang="zh-TW" altLang="en-US" sz="4800" b="1" dirty="0">
                 <a:solidFill>
                   <a:srgbClr val="660033"/>
                 </a:solidFill>
@@ -3458,7 +3338,7 @@
               </a:rPr>
               <a:t>身心擺上</a:t>
             </a:r>
-            <a:endParaRPr lang="en-US" altLang="zh-TW" sz="4800" b="1" dirty="0" smtClean="0">
+            <a:endParaRPr lang="en-US" altLang="zh-TW" sz="4800" b="1" dirty="0">
               <a:solidFill>
                 <a:srgbClr val="660033"/>
               </a:solidFill>
@@ -3492,7 +3372,7 @@
           <a:p>
             <a:pPr algn="ctr"/>
             <a:r>
-              <a:rPr lang="en-US" sz="2400" b="1" dirty="0" smtClean="0">
+              <a:rPr lang="en-US" sz="2400" b="1" dirty="0">
                 <a:solidFill>
                   <a:srgbClr val="660033"/>
                 </a:solidFill>
@@ -3502,17 +3382,17 @@
               <a:t>( </a:t>
             </a:r>
             <a:r>
-              <a:rPr lang="zh-CN" altLang="en-US" sz="2400" b="1" dirty="0" smtClean="0">
+              <a:rPr lang="zh-CN" altLang="en-US" sz="2400" b="1" dirty="0">
                 <a:solidFill>
                   <a:srgbClr val="660033"/>
                 </a:solidFill>
                 <a:latin typeface="Microsoft JhengHei" panose="020B0604030504040204" pitchFamily="34" charset="-120"/>
                 <a:ea typeface="Microsoft JhengHei" panose="020B0604030504040204" pitchFamily="34" charset="-120"/>
               </a:rPr>
-              <a:t>正</a:t>
-            </a:r>
-            <a:r>
-              <a:rPr lang="en-US" sz="2400" b="1" dirty="0" smtClean="0">
+              <a:t>正歌</a:t>
+            </a:r>
+            <a:r>
+              <a:rPr lang="en-US" sz="2400" b="1" dirty="0">
                 <a:solidFill>
                   <a:srgbClr val="660033"/>
                 </a:solidFill>
@@ -3535,13 +3415,6 @@
   <p:clrMapOvr>
     <a:masterClrMapping/>
   </p:clrMapOvr>
-  <p:timing>
-    <p:tnLst>
-      <p:par>
-        <p:cTn id="1" dur="indefinite" restart="never" nodeType="tmRoot"/>
-      </p:par>
-    </p:tnLst>
-  </p:timing>
 </p:sld>
 </file>
 
@@ -3588,7 +3461,7 @@
               <a:buNone/>
             </a:pPr>
             <a:r>
-              <a:rPr lang="zh-TW" altLang="en-US" sz="4800" b="1" dirty="0" smtClean="0">
+              <a:rPr lang="zh-TW" altLang="en-US" sz="4800" b="1" dirty="0">
                 <a:solidFill>
                   <a:srgbClr val="660033"/>
                 </a:solidFill>
@@ -3597,7 +3470,7 @@
               </a:rPr>
               <a:t>深知偉大使命</a:t>
             </a:r>
-            <a:endParaRPr lang="en-US" altLang="zh-TW" sz="4800" b="1" dirty="0" smtClean="0">
+            <a:endParaRPr lang="en-US" altLang="zh-TW" sz="4800" b="1" dirty="0">
               <a:solidFill>
                 <a:srgbClr val="660033"/>
               </a:solidFill>
@@ -3610,7 +3483,7 @@
               <a:buNone/>
             </a:pPr>
             <a:r>
-              <a:rPr lang="zh-TW" altLang="en-US" sz="4800" b="1" dirty="0" smtClean="0">
+              <a:rPr lang="zh-TW" altLang="en-US" sz="4800" b="1" dirty="0">
                 <a:solidFill>
                   <a:srgbClr val="660033"/>
                 </a:solidFill>
@@ -3619,7 +3492,7 @@
               </a:rPr>
               <a:t>唯盼薪火相傳此生不退縮</a:t>
             </a:r>
-            <a:endParaRPr lang="en-US" altLang="zh-TW" sz="4800" b="1" dirty="0" smtClean="0">
+            <a:endParaRPr lang="en-US" altLang="zh-TW" sz="4800" b="1" dirty="0">
               <a:solidFill>
                 <a:srgbClr val="660033"/>
               </a:solidFill>
@@ -3653,7 +3526,7 @@
           <a:p>
             <a:pPr algn="ctr"/>
             <a:r>
-              <a:rPr lang="en-US" sz="2400" b="1" dirty="0" smtClean="0">
+              <a:rPr lang="en-US" sz="2400" b="1" dirty="0">
                 <a:solidFill>
                   <a:srgbClr val="660033"/>
                 </a:solidFill>
@@ -3663,17 +3536,17 @@
               <a:t>( </a:t>
             </a:r>
             <a:r>
-              <a:rPr lang="zh-CN" altLang="en-US" sz="2400" b="1" dirty="0" smtClean="0">
+              <a:rPr lang="zh-CN" altLang="en-US" sz="2400" b="1" dirty="0">
                 <a:solidFill>
                   <a:srgbClr val="660033"/>
                 </a:solidFill>
                 <a:latin typeface="Microsoft JhengHei" panose="020B0604030504040204" pitchFamily="34" charset="-120"/>
                 <a:ea typeface="Microsoft JhengHei" panose="020B0604030504040204" pitchFamily="34" charset="-120"/>
               </a:rPr>
-              <a:t>正</a:t>
-            </a:r>
-            <a:r>
-              <a:rPr lang="en-US" sz="2400" b="1" dirty="0" smtClean="0">
+              <a:t>正歌</a:t>
+            </a:r>
+            <a:r>
+              <a:rPr lang="en-US" sz="2400" b="1" dirty="0">
                 <a:solidFill>
                   <a:srgbClr val="660033"/>
                 </a:solidFill>
@@ -3696,13 +3569,6 @@
   <p:clrMapOvr>
     <a:masterClrMapping/>
   </p:clrMapOvr>
-  <p:timing>
-    <p:tnLst>
-      <p:par>
-        <p:cTn id="1" dur="indefinite" restart="never" nodeType="tmRoot"/>
-      </p:par>
-    </p:tnLst>
-  </p:timing>
 </p:sld>
 </file>
 
@@ -3749,7 +3615,7 @@
               <a:buNone/>
             </a:pPr>
             <a:r>
-              <a:rPr lang="zh-TW" altLang="en-US" sz="4800" b="1" dirty="0" smtClean="0">
+              <a:rPr lang="zh-TW" altLang="en-US" sz="4800" b="1" dirty="0">
                 <a:solidFill>
                   <a:srgbClr val="660033"/>
                 </a:solidFill>
@@ -3758,7 +3624,7 @@
               </a:rPr>
               <a:t>別懼怕  別震驚</a:t>
             </a:r>
-            <a:endParaRPr lang="en-US" altLang="zh-TW" sz="4800" b="1" dirty="0" smtClean="0">
+            <a:endParaRPr lang="en-US" altLang="zh-TW" sz="4800" b="1" dirty="0">
               <a:solidFill>
                 <a:srgbClr val="660033"/>
               </a:solidFill>
@@ -3771,7 +3637,7 @@
               <a:buNone/>
             </a:pPr>
             <a:r>
-              <a:rPr lang="zh-TW" altLang="en-US" sz="4800" b="1" dirty="0" smtClean="0">
+              <a:rPr lang="zh-TW" altLang="en-US" sz="4800" b="1" dirty="0">
                 <a:solidFill>
                   <a:srgbClr val="660033"/>
                 </a:solidFill>
@@ -3780,7 +3646,7 @@
               </a:rPr>
               <a:t>作主精兵終會得勝</a:t>
             </a:r>
-            <a:endParaRPr lang="en-US" altLang="zh-TW" sz="4800" b="1" dirty="0" smtClean="0">
+            <a:endParaRPr lang="en-US" altLang="zh-TW" sz="4800" b="1" dirty="0">
               <a:solidFill>
                 <a:srgbClr val="660033"/>
               </a:solidFill>
@@ -3814,7 +3680,7 @@
           <a:p>
             <a:pPr algn="ctr"/>
             <a:r>
-              <a:rPr lang="en-US" sz="2400" b="1" dirty="0" smtClean="0">
+              <a:rPr lang="en-US" sz="2400" b="1" dirty="0">
                 <a:solidFill>
                   <a:srgbClr val="660033"/>
                 </a:solidFill>
@@ -3824,34 +3690,24 @@
               <a:t>( </a:t>
             </a:r>
             <a:r>
-              <a:rPr lang="zh-CN" altLang="en-US" sz="2400" b="1" dirty="0" smtClean="0">
+              <a:rPr lang="zh-CN" altLang="en-US" sz="2400" b="1" dirty="0">
                 <a:solidFill>
                   <a:srgbClr val="660033"/>
                 </a:solidFill>
                 <a:latin typeface="Microsoft JhengHei" panose="020B0604030504040204" pitchFamily="34" charset="-120"/>
                 <a:ea typeface="Microsoft JhengHei" panose="020B0604030504040204" pitchFamily="34" charset="-120"/>
               </a:rPr>
-              <a:t>前副</a:t>
-            </a:r>
-            <a:r>
-              <a:rPr lang="en-US" sz="2400" b="1" dirty="0" smtClean="0">
+              <a:t>前副歌</a:t>
+            </a:r>
+            <a:r>
+              <a:rPr lang="en-US" sz="2400" b="1" dirty="0">
                 <a:solidFill>
                   <a:srgbClr val="660033"/>
                 </a:solidFill>
                 <a:latin typeface="Microsoft JhengHei" panose="020B0604030504040204" pitchFamily="34" charset="-120"/>
                 <a:ea typeface="Microsoft JhengHei" panose="020B0604030504040204" pitchFamily="34" charset="-120"/>
               </a:rPr>
-              <a:t> </a:t>
-            </a:r>
-            <a:r>
-              <a:rPr lang="en-US" sz="2400" b="1" dirty="0" smtClean="0">
-                <a:solidFill>
-                  <a:srgbClr val="660033"/>
-                </a:solidFill>
-                <a:latin typeface="Microsoft JhengHei" panose="020B0604030504040204" pitchFamily="34" charset="-120"/>
-                <a:ea typeface="Microsoft JhengHei" panose="020B0604030504040204" pitchFamily="34" charset="-120"/>
-              </a:rPr>
-              <a:t>)</a:t>
+              <a:t> )</a:t>
             </a:r>
             <a:endParaRPr lang="vi-VN" sz="2400" b="1" dirty="0">
               <a:solidFill>
@@ -3867,13 +3723,6 @@
   <p:clrMapOvr>
     <a:masterClrMapping/>
   </p:clrMapOvr>
-  <p:timing>
-    <p:tnLst>
-      <p:par>
-        <p:cTn id="1" dur="indefinite" restart="never" nodeType="tmRoot"/>
-      </p:par>
-    </p:tnLst>
-  </p:timing>
 </p:sld>
 </file>
 
@@ -3920,7 +3769,7 @@
               <a:buNone/>
             </a:pPr>
             <a:r>
-              <a:rPr lang="zh-TW" altLang="en-US" sz="4800" b="1" dirty="0" smtClean="0">
+              <a:rPr lang="zh-TW" altLang="en-US" sz="4800" b="1" dirty="0">
                 <a:solidFill>
                   <a:srgbClr val="660033"/>
                 </a:solidFill>
@@ -3929,7 +3778,7 @@
               </a:rPr>
               <a:t>興起我  差遣我</a:t>
             </a:r>
-            <a:endParaRPr lang="en-US" altLang="zh-TW" sz="4800" b="1" dirty="0" smtClean="0">
+            <a:endParaRPr lang="en-US" altLang="zh-TW" sz="4800" b="1" dirty="0">
               <a:solidFill>
                 <a:srgbClr val="660033"/>
               </a:solidFill>
@@ -3942,7 +3791,7 @@
               <a:buNone/>
             </a:pPr>
             <a:r>
-              <a:rPr lang="zh-TW" altLang="en-US" sz="4800" b="1" dirty="0" smtClean="0">
+              <a:rPr lang="zh-TW" altLang="en-US" sz="4800" b="1" dirty="0">
                 <a:solidFill>
                   <a:srgbClr val="660033"/>
                 </a:solidFill>
@@ -3951,7 +3800,7 @@
               </a:rPr>
               <a:t>末後世代靈魂  盼見著神恩</a:t>
             </a:r>
-            <a:endParaRPr lang="en-US" altLang="zh-TW" sz="4800" b="1" dirty="0" smtClean="0">
+            <a:endParaRPr lang="en-US" altLang="zh-TW" sz="4800" b="1" dirty="0">
               <a:solidFill>
                 <a:srgbClr val="660033"/>
               </a:solidFill>
@@ -3985,7 +3834,7 @@
           <a:p>
             <a:pPr algn="ctr"/>
             <a:r>
-              <a:rPr lang="en-US" sz="2400" b="1" dirty="0" smtClean="0">
+              <a:rPr lang="en-US" sz="2400" b="1" dirty="0">
                 <a:solidFill>
                   <a:srgbClr val="660033"/>
                 </a:solidFill>
@@ -3995,34 +3844,24 @@
               <a:t>( </a:t>
             </a:r>
             <a:r>
-              <a:rPr lang="zh-CN" altLang="en-US" sz="2400" b="1" dirty="0" smtClean="0">
+              <a:rPr lang="zh-CN" altLang="en-US" sz="2400" b="1" dirty="0">
                 <a:solidFill>
                   <a:srgbClr val="660033"/>
                 </a:solidFill>
                 <a:latin typeface="Microsoft JhengHei" panose="020B0604030504040204" pitchFamily="34" charset="-120"/>
                 <a:ea typeface="Microsoft JhengHei" panose="020B0604030504040204" pitchFamily="34" charset="-120"/>
               </a:rPr>
-              <a:t>前副</a:t>
-            </a:r>
-            <a:r>
-              <a:rPr lang="en-US" sz="2400" b="1" dirty="0" smtClean="0">
+              <a:t>前副歌</a:t>
+            </a:r>
+            <a:r>
+              <a:rPr lang="en-US" sz="2400" b="1" dirty="0">
                 <a:solidFill>
                   <a:srgbClr val="660033"/>
                 </a:solidFill>
                 <a:latin typeface="Microsoft JhengHei" panose="020B0604030504040204" pitchFamily="34" charset="-120"/>
                 <a:ea typeface="Microsoft JhengHei" panose="020B0604030504040204" pitchFamily="34" charset="-120"/>
               </a:rPr>
-              <a:t> </a:t>
-            </a:r>
-            <a:r>
-              <a:rPr lang="en-US" sz="2400" b="1" dirty="0" smtClean="0">
-                <a:solidFill>
-                  <a:srgbClr val="660033"/>
-                </a:solidFill>
-                <a:latin typeface="Microsoft JhengHei" panose="020B0604030504040204" pitchFamily="34" charset="-120"/>
-                <a:ea typeface="Microsoft JhengHei" panose="020B0604030504040204" pitchFamily="34" charset="-120"/>
-              </a:rPr>
-              <a:t>)</a:t>
+              <a:t> )</a:t>
             </a:r>
             <a:endParaRPr lang="vi-VN" sz="2400" b="1" dirty="0">
               <a:solidFill>
@@ -4038,13 +3877,6 @@
   <p:clrMapOvr>
     <a:masterClrMapping/>
   </p:clrMapOvr>
-  <p:timing>
-    <p:tnLst>
-      <p:par>
-        <p:cTn id="1" dur="indefinite" restart="never" nodeType="tmRoot"/>
-      </p:par>
-    </p:tnLst>
-  </p:timing>
 </p:sld>
 </file>
 
@@ -4091,7 +3923,7 @@
               <a:buNone/>
             </a:pPr>
             <a:r>
-              <a:rPr lang="zh-TW" altLang="en-US" sz="4800" b="1" dirty="0" smtClean="0">
+              <a:rPr lang="zh-TW" altLang="en-US" sz="4800" b="1" dirty="0">
                 <a:solidFill>
                   <a:srgbClr val="660033"/>
                 </a:solidFill>
@@ -4100,7 +3932,7 @@
               </a:rPr>
               <a:t>上主信實慈愛  觸動每個世代</a:t>
             </a:r>
-            <a:endParaRPr lang="en-US" altLang="zh-TW" sz="4800" b="1" dirty="0" smtClean="0">
+            <a:endParaRPr lang="en-US" altLang="zh-TW" sz="4800" b="1" dirty="0">
               <a:solidFill>
                 <a:srgbClr val="660033"/>
               </a:solidFill>
@@ -4113,46 +3945,16 @@
               <a:buNone/>
             </a:pPr>
             <a:r>
-              <a:rPr lang="zh-TW" altLang="en-US" sz="4800" b="1" dirty="0" smtClean="0">
+              <a:rPr lang="zh-TW" altLang="en-US" sz="4800" b="1" dirty="0">
                 <a:solidFill>
                   <a:srgbClr val="660033"/>
                 </a:solidFill>
                 <a:latin typeface="微軟正黑體" pitchFamily="34" charset="-120"/>
                 <a:ea typeface="微軟正黑體" pitchFamily="34" charset="-120"/>
               </a:rPr>
-              <a:t>是</a:t>
-            </a:r>
-            <a:r>
-              <a:rPr lang="zh-TW" altLang="en-US" sz="4800" b="1" dirty="0" smtClean="0">
-                <a:solidFill>
-                  <a:srgbClr val="660033"/>
-                </a:solidFill>
-                <a:latin typeface="微軟正黑體" pitchFamily="34" charset="-120"/>
-                <a:ea typeface="微軟正黑體" pitchFamily="34" charset="-120"/>
-              </a:rPr>
-              <a:t>祢</a:t>
-            </a:r>
-            <a:r>
-              <a:rPr lang="zh-TW" altLang="en-US" sz="4800" b="1" dirty="0" smtClean="0">
-                <a:solidFill>
-                  <a:srgbClr val="660033"/>
-                </a:solidFill>
-                <a:latin typeface="微軟正黑體" pitchFamily="34" charset="-120"/>
-                <a:ea typeface="微軟正黑體" pitchFamily="34" charset="-120"/>
-              </a:rPr>
-              <a:t>所</a:t>
-            </a:r>
-            <a:r>
-              <a:rPr lang="zh-TW" altLang="en-US" sz="4800" b="1" dirty="0" smtClean="0">
-                <a:solidFill>
-                  <a:srgbClr val="660033"/>
-                </a:solidFill>
-                <a:latin typeface="微軟正黑體" pitchFamily="34" charset="-120"/>
-                <a:ea typeface="微軟正黑體" pitchFamily="34" charset="-120"/>
-              </a:rPr>
-              <a:t>愛從不丟棄輕看</a:t>
-            </a:r>
-            <a:endParaRPr lang="en-US" altLang="zh-TW" sz="4800" b="1" dirty="0" smtClean="0">
+              <a:t>是祢所愛從不丟棄輕看</a:t>
+            </a:r>
+            <a:endParaRPr lang="en-US" altLang="zh-TW" sz="4800" b="1" dirty="0">
               <a:solidFill>
                 <a:srgbClr val="660033"/>
               </a:solidFill>
@@ -4186,7 +3988,7 @@
           <a:p>
             <a:pPr algn="ctr"/>
             <a:r>
-              <a:rPr lang="en-US" sz="2400" b="1" dirty="0" smtClean="0">
+              <a:rPr lang="en-US" sz="2400" b="1" dirty="0">
                 <a:solidFill>
                   <a:srgbClr val="660033"/>
                 </a:solidFill>
@@ -4196,34 +3998,24 @@
               <a:t>( </a:t>
             </a:r>
             <a:r>
-              <a:rPr lang="zh-CN" altLang="en-US" sz="2400" b="1" dirty="0" smtClean="0">
+              <a:rPr lang="zh-CN" altLang="en-US" sz="2400" b="1" dirty="0">
                 <a:solidFill>
                   <a:srgbClr val="660033"/>
                 </a:solidFill>
                 <a:latin typeface="Microsoft JhengHei" panose="020B0604030504040204" pitchFamily="34" charset="-120"/>
                 <a:ea typeface="Microsoft JhengHei" panose="020B0604030504040204" pitchFamily="34" charset="-120"/>
               </a:rPr>
-              <a:t>副</a:t>
-            </a:r>
-            <a:r>
-              <a:rPr lang="en-US" sz="2400" b="1" dirty="0" smtClean="0">
+              <a:t>副歌</a:t>
+            </a:r>
+            <a:r>
+              <a:rPr lang="en-US" sz="2400" b="1" dirty="0">
                 <a:solidFill>
                   <a:srgbClr val="660033"/>
                 </a:solidFill>
                 <a:latin typeface="Microsoft JhengHei" panose="020B0604030504040204" pitchFamily="34" charset="-120"/>
                 <a:ea typeface="Microsoft JhengHei" panose="020B0604030504040204" pitchFamily="34" charset="-120"/>
               </a:rPr>
-              <a:t> </a:t>
-            </a:r>
-            <a:r>
-              <a:rPr lang="en-US" sz="2400" b="1" dirty="0" smtClean="0">
-                <a:solidFill>
-                  <a:srgbClr val="660033"/>
-                </a:solidFill>
-                <a:latin typeface="Microsoft JhengHei" panose="020B0604030504040204" pitchFamily="34" charset="-120"/>
-                <a:ea typeface="Microsoft JhengHei" panose="020B0604030504040204" pitchFamily="34" charset="-120"/>
-              </a:rPr>
-              <a:t>)</a:t>
+              <a:t> )</a:t>
             </a:r>
             <a:endParaRPr lang="vi-VN" sz="2400" b="1" dirty="0">
               <a:solidFill>
@@ -4239,13 +4031,6 @@
   <p:clrMapOvr>
     <a:masterClrMapping/>
   </p:clrMapOvr>
-  <p:timing>
-    <p:tnLst>
-      <p:par>
-        <p:cTn id="1" dur="indefinite" restart="never" nodeType="tmRoot"/>
-      </p:par>
-    </p:tnLst>
-  </p:timing>
 </p:sld>
 </file>
 
@@ -4292,7 +4077,7 @@
               <a:buNone/>
             </a:pPr>
             <a:r>
-              <a:rPr lang="zh-TW" altLang="en-US" sz="4800" b="1" dirty="0" smtClean="0">
+              <a:rPr lang="zh-TW" altLang="en-US" sz="4800" b="1" dirty="0">
                 <a:solidFill>
                   <a:srgbClr val="660033"/>
                 </a:solidFill>
@@ -4301,7 +4086,7 @@
               </a:rPr>
               <a:t>傳承我主使命  跨代神恩印證</a:t>
             </a:r>
-            <a:endParaRPr lang="en-US" altLang="zh-TW" sz="4800" b="1" dirty="0" smtClean="0">
+            <a:endParaRPr lang="en-US" altLang="zh-TW" sz="4800" b="1" dirty="0">
               <a:solidFill>
                 <a:srgbClr val="660033"/>
               </a:solidFill>
@@ -4314,7 +4099,7 @@
               <a:buNone/>
             </a:pPr>
             <a:r>
-              <a:rPr lang="zh-TW" altLang="en-US" sz="4800" b="1" dirty="0" smtClean="0">
+              <a:rPr lang="zh-TW" altLang="en-US" sz="4800" b="1" dirty="0">
                 <a:solidFill>
                   <a:srgbClr val="660033"/>
                 </a:solidFill>
@@ -4323,7 +4108,7 @@
               </a:rPr>
               <a:t>人人看見  榮耀彰顯  到永遠</a:t>
             </a:r>
-            <a:endParaRPr lang="en-US" altLang="zh-TW" sz="4800" b="1" dirty="0" smtClean="0">
+            <a:endParaRPr lang="en-US" altLang="zh-TW" sz="4800" b="1" dirty="0">
               <a:solidFill>
                 <a:srgbClr val="660033"/>
               </a:solidFill>
@@ -4357,7 +4142,7 @@
           <a:p>
             <a:pPr algn="ctr"/>
             <a:r>
-              <a:rPr lang="en-US" sz="2400" b="1" dirty="0" smtClean="0">
+              <a:rPr lang="en-US" sz="2400" b="1" dirty="0">
                 <a:solidFill>
                   <a:srgbClr val="660033"/>
                 </a:solidFill>
@@ -4367,34 +4152,24 @@
               <a:t>( </a:t>
             </a:r>
             <a:r>
-              <a:rPr lang="zh-CN" altLang="en-US" sz="2400" b="1" dirty="0" smtClean="0">
+              <a:rPr lang="zh-CN" altLang="en-US" sz="2400" b="1" dirty="0">
                 <a:solidFill>
                   <a:srgbClr val="660033"/>
                 </a:solidFill>
                 <a:latin typeface="Microsoft JhengHei" panose="020B0604030504040204" pitchFamily="34" charset="-120"/>
                 <a:ea typeface="Microsoft JhengHei" panose="020B0604030504040204" pitchFamily="34" charset="-120"/>
               </a:rPr>
-              <a:t>副</a:t>
-            </a:r>
-            <a:r>
-              <a:rPr lang="en-US" sz="2400" b="1" dirty="0" smtClean="0">
+              <a:t>副歌</a:t>
+            </a:r>
+            <a:r>
+              <a:rPr lang="en-US" sz="2400" b="1" dirty="0">
                 <a:solidFill>
                   <a:srgbClr val="660033"/>
                 </a:solidFill>
                 <a:latin typeface="Microsoft JhengHei" panose="020B0604030504040204" pitchFamily="34" charset="-120"/>
                 <a:ea typeface="Microsoft JhengHei" panose="020B0604030504040204" pitchFamily="34" charset="-120"/>
               </a:rPr>
-              <a:t> </a:t>
-            </a:r>
-            <a:r>
-              <a:rPr lang="en-US" sz="2400" b="1" dirty="0" smtClean="0">
-                <a:solidFill>
-                  <a:srgbClr val="660033"/>
-                </a:solidFill>
-                <a:latin typeface="Microsoft JhengHei" panose="020B0604030504040204" pitchFamily="34" charset="-120"/>
-                <a:ea typeface="Microsoft JhengHei" panose="020B0604030504040204" pitchFamily="34" charset="-120"/>
-              </a:rPr>
-              <a:t>)</a:t>
+              <a:t> )</a:t>
             </a:r>
             <a:endParaRPr lang="vi-VN" sz="2400" b="1" dirty="0">
               <a:solidFill>
@@ -4410,13 +4185,6 @@
   <p:clrMapOvr>
     <a:masterClrMapping/>
   </p:clrMapOvr>
-  <p:timing>
-    <p:tnLst>
-      <p:par>
-        <p:cTn id="1" dur="indefinite" restart="never" nodeType="tmRoot"/>
-      </p:par>
-    </p:tnLst>
-  </p:timing>
 </p:sld>
 </file>
 
@@ -4463,7 +4231,7 @@
               <a:buNone/>
             </a:pPr>
             <a:r>
-              <a:rPr lang="zh-TW" altLang="en-US" sz="4800" b="1" dirty="0" smtClean="0">
+              <a:rPr lang="zh-TW" altLang="en-US" sz="4800" b="1" dirty="0">
                 <a:solidFill>
                   <a:srgbClr val="660033"/>
                 </a:solidFill>
@@ -4472,7 +4240,7 @@
               </a:rPr>
               <a:t>站在美好應許  跨代同聲宣告</a:t>
             </a:r>
-            <a:endParaRPr lang="en-US" altLang="zh-TW" sz="4800" b="1" dirty="0" smtClean="0">
+            <a:endParaRPr lang="en-US" altLang="zh-TW" sz="4800" b="1" dirty="0">
               <a:solidFill>
                 <a:srgbClr val="660033"/>
               </a:solidFill>
@@ -4485,7 +4253,7 @@
               <a:buNone/>
             </a:pPr>
             <a:r>
-              <a:rPr lang="zh-TW" altLang="en-US" sz="4800" b="1" dirty="0" smtClean="0">
+              <a:rPr lang="zh-TW" altLang="en-US" sz="4800" b="1" dirty="0">
                 <a:solidFill>
                   <a:srgbClr val="660033"/>
                 </a:solidFill>
@@ -4494,7 +4262,7 @@
               </a:rPr>
               <a:t>至於我 和我家  必定事奉祢</a:t>
             </a:r>
-            <a:endParaRPr lang="en-US" altLang="zh-TW" sz="4800" b="1" dirty="0" smtClean="0">
+            <a:endParaRPr lang="en-US" altLang="zh-TW" sz="4800" b="1" dirty="0">
               <a:solidFill>
                 <a:srgbClr val="660033"/>
               </a:solidFill>
@@ -4528,7 +4296,7 @@
           <a:p>
             <a:pPr algn="ctr"/>
             <a:r>
-              <a:rPr lang="en-US" sz="2400" b="1" dirty="0" smtClean="0">
+              <a:rPr lang="en-US" sz="2400" b="1" dirty="0">
                 <a:solidFill>
                   <a:srgbClr val="660033"/>
                 </a:solidFill>
@@ -4538,17 +4306,17 @@
               <a:t>( </a:t>
             </a:r>
             <a:r>
-              <a:rPr lang="zh-CN" altLang="en-US" sz="2400" b="1" dirty="0">
+              <a:rPr lang="zh-CN" altLang="en-US" sz="2400" b="1">
                 <a:solidFill>
                   <a:srgbClr val="660033"/>
                 </a:solidFill>
                 <a:latin typeface="Microsoft JhengHei" panose="020B0604030504040204" pitchFamily="34" charset="-120"/>
                 <a:ea typeface="Microsoft JhengHei" panose="020B0604030504040204" pitchFamily="34" charset="-120"/>
               </a:rPr>
-              <a:t>尾</a:t>
-            </a:r>
-            <a:r>
-              <a:rPr lang="en-US" sz="2400" b="1" dirty="0" smtClean="0">
+              <a:t>尾句</a:t>
+            </a:r>
+            <a:r>
+              <a:rPr lang="en-US" sz="2400" b="1">
                 <a:solidFill>
                   <a:srgbClr val="660033"/>
                 </a:solidFill>
@@ -4558,7 +4326,7 @@
               <a:t> </a:t>
             </a:r>
             <a:r>
-              <a:rPr lang="en-US" sz="2400" b="1" dirty="0" smtClean="0">
+              <a:rPr lang="en-US" sz="2400" b="1" dirty="0">
                 <a:solidFill>
                   <a:srgbClr val="660033"/>
                 </a:solidFill>
@@ -4581,13 +4349,6 @@
   <p:clrMapOvr>
     <a:masterClrMapping/>
   </p:clrMapOvr>
-  <p:timing>
-    <p:tnLst>
-      <p:par>
-        <p:cTn id="1" dur="indefinite" restart="never" nodeType="tmRoot"/>
-      </p:par>
-    </p:tnLst>
-  </p:timing>
 </p:sld>
 </file>
 

--- a/跨代傳承.pptx
+++ b/跨代傳承.pptx
@@ -310,7 +310,7 @@
           <a:p>
             <a:fld id="{F1CB83EB-EB33-4DFA-9BDA-78308EC18029}" type="datetimeFigureOut">
               <a:rPr lang="zh-TW" altLang="en-US" smtClean="0"/>
-              <a:t>2024/10/5</a:t>
+              <a:t>2024/10/12</a:t>
             </a:fld>
             <a:endParaRPr lang="zh-TW" altLang="en-US"/>
           </a:p>
@@ -473,7 +473,7 @@
           <a:p>
             <a:fld id="{F1CB83EB-EB33-4DFA-9BDA-78308EC18029}" type="datetimeFigureOut">
               <a:rPr lang="zh-TW" altLang="en-US" smtClean="0"/>
-              <a:t>2024/10/5</a:t>
+              <a:t>2024/10/12</a:t>
             </a:fld>
             <a:endParaRPr lang="zh-TW" altLang="en-US"/>
           </a:p>
@@ -646,7 +646,7 @@
           <a:p>
             <a:fld id="{F1CB83EB-EB33-4DFA-9BDA-78308EC18029}" type="datetimeFigureOut">
               <a:rPr lang="zh-TW" altLang="en-US" smtClean="0"/>
-              <a:t>2024/10/5</a:t>
+              <a:t>2024/10/12</a:t>
             </a:fld>
             <a:endParaRPr lang="zh-TW" altLang="en-US"/>
           </a:p>
@@ -809,7 +809,7 @@
           <a:p>
             <a:fld id="{F1CB83EB-EB33-4DFA-9BDA-78308EC18029}" type="datetimeFigureOut">
               <a:rPr lang="zh-TW" altLang="en-US" smtClean="0"/>
-              <a:t>2024/10/5</a:t>
+              <a:t>2024/10/12</a:t>
             </a:fld>
             <a:endParaRPr lang="zh-TW" altLang="en-US"/>
           </a:p>
@@ -1049,7 +1049,7 @@
           <a:p>
             <a:fld id="{F1CB83EB-EB33-4DFA-9BDA-78308EC18029}" type="datetimeFigureOut">
               <a:rPr lang="zh-TW" altLang="en-US" smtClean="0"/>
-              <a:t>2024/10/5</a:t>
+              <a:t>2024/10/12</a:t>
             </a:fld>
             <a:endParaRPr lang="zh-TW" altLang="en-US"/>
           </a:p>
@@ -1329,7 +1329,7 @@
           <a:p>
             <a:fld id="{F1CB83EB-EB33-4DFA-9BDA-78308EC18029}" type="datetimeFigureOut">
               <a:rPr lang="zh-TW" altLang="en-US" smtClean="0"/>
-              <a:t>2024/10/5</a:t>
+              <a:t>2024/10/12</a:t>
             </a:fld>
             <a:endParaRPr lang="zh-TW" altLang="en-US"/>
           </a:p>
@@ -1743,7 +1743,7 @@
           <a:p>
             <a:fld id="{F1CB83EB-EB33-4DFA-9BDA-78308EC18029}" type="datetimeFigureOut">
               <a:rPr lang="zh-TW" altLang="en-US" smtClean="0"/>
-              <a:t>2024/10/5</a:t>
+              <a:t>2024/10/12</a:t>
             </a:fld>
             <a:endParaRPr lang="zh-TW" altLang="en-US"/>
           </a:p>
@@ -1855,7 +1855,7 @@
           <a:p>
             <a:fld id="{F1CB83EB-EB33-4DFA-9BDA-78308EC18029}" type="datetimeFigureOut">
               <a:rPr lang="zh-TW" altLang="en-US" smtClean="0"/>
-              <a:t>2024/10/5</a:t>
+              <a:t>2024/10/12</a:t>
             </a:fld>
             <a:endParaRPr lang="zh-TW" altLang="en-US"/>
           </a:p>
@@ -1945,7 +1945,7 @@
           <a:p>
             <a:fld id="{F1CB83EB-EB33-4DFA-9BDA-78308EC18029}" type="datetimeFigureOut">
               <a:rPr lang="zh-TW" altLang="en-US" smtClean="0"/>
-              <a:t>2024/10/5</a:t>
+              <a:t>2024/10/12</a:t>
             </a:fld>
             <a:endParaRPr lang="zh-TW" altLang="en-US"/>
           </a:p>
@@ -2215,7 +2215,7 @@
           <a:p>
             <a:fld id="{F1CB83EB-EB33-4DFA-9BDA-78308EC18029}" type="datetimeFigureOut">
               <a:rPr lang="zh-TW" altLang="en-US" smtClean="0"/>
-              <a:t>2024/10/5</a:t>
+              <a:t>2024/10/12</a:t>
             </a:fld>
             <a:endParaRPr lang="zh-TW" altLang="en-US"/>
           </a:p>
@@ -2465,7 +2465,7 @@
           <a:p>
             <a:fld id="{F1CB83EB-EB33-4DFA-9BDA-78308EC18029}" type="datetimeFigureOut">
               <a:rPr lang="zh-TW" altLang="en-US" smtClean="0"/>
-              <a:t>2024/10/5</a:t>
+              <a:t>2024/10/12</a:t>
             </a:fld>
             <a:endParaRPr lang="zh-TW" altLang="en-US"/>
           </a:p>
@@ -2676,7 +2676,7 @@
           <a:p>
             <a:fld id="{F1CB83EB-EB33-4DFA-9BDA-78308EC18029}" type="datetimeFigureOut">
               <a:rPr lang="zh-TW" altLang="en-US" smtClean="0"/>
-              <a:t>2024/10/5</a:t>
+              <a:t>2024/10/12</a:t>
             </a:fld>
             <a:endParaRPr lang="zh-TW" altLang="en-US"/>
           </a:p>
@@ -4106,7 +4106,7 @@
                 <a:latin typeface="微軟正黑體" pitchFamily="34" charset="-120"/>
                 <a:ea typeface="微軟正黑體" pitchFamily="34" charset="-120"/>
               </a:rPr>
-              <a:t>人人看見  榮耀彰顯  到永遠</a:t>
+              <a:t>人人看見  榮耀彰顯到永遠</a:t>
             </a:r>
             <a:endParaRPr lang="en-US" altLang="zh-TW" sz="4800" b="1" dirty="0">
               <a:solidFill>
@@ -4260,7 +4260,7 @@
                 <a:latin typeface="微軟正黑體" pitchFamily="34" charset="-120"/>
                 <a:ea typeface="微軟正黑體" pitchFamily="34" charset="-120"/>
               </a:rPr>
-              <a:t>至於我 和我家  必定事奉祢</a:t>
+              <a:t>至於我和我家  必定事奉祢</a:t>
             </a:r>
             <a:endParaRPr lang="en-US" altLang="zh-TW" sz="4800" b="1" dirty="0">
               <a:solidFill>
